--- a/Protein-sequence-analyzer/protein-sequence-analyzer-presentation.pptx
+++ b/Protein-sequence-analyzer/protein-sequence-analyzer-presentation.pptx
@@ -10162,7 +10162,7 @@
         <p:spPr>
           <a:xfrm>
             <a:off x="777240" y="5440680"/>
-            <a:ext cx="5486400" cy="274320"/>
+            <a:ext cx="5486400" cy="200055"/>
           </a:xfrm>
           <a:prstGeom prst="rect">
             <a:avLst/>
@@ -10176,6 +10176,15 @@
           <a:lstStyle/>
           <a:p>
             <a:pPr algn="l"/>
+            <a:r>
+              <a:rPr sz="1300" b="0" dirty="0">
+                <a:solidFill>
+                  <a:srgbClr val="AABCC9"/>
+                </a:solidFill>
+                <a:latin typeface="Aptos"/>
+              </a:rPr>
+              <a:t>Presentation </a:t>
+            </a:r>
             <a:r>
               <a:rPr sz="1300" b="0">
                 <a:solidFill>
@@ -10183,7 +10192,34 @@
                 </a:solidFill>
                 <a:latin typeface="Aptos"/>
               </a:rPr>
-              <a:t>Presentation outline  ?  5?7 minutes + questions</a:t>
+              <a:t>outline 5</a:t>
+            </a:r>
+            <a:r>
+              <a:rPr lang="en-US" sz="1300">
+                <a:solidFill>
+                  <a:srgbClr val="AABCC9"/>
+                </a:solidFill>
+                <a:latin typeface="Aptos"/>
+              </a:rPr>
+              <a:t>-</a:t>
+            </a:r>
+            <a:r>
+              <a:rPr sz="1300" b="0">
+                <a:solidFill>
+                  <a:srgbClr val="AABCC9"/>
+                </a:solidFill>
+                <a:latin typeface="Aptos"/>
+              </a:rPr>
+              <a:t>7 </a:t>
+            </a:r>
+            <a:r>
+              <a:rPr sz="1300" b="0" dirty="0">
+                <a:solidFill>
+                  <a:srgbClr val="AABCC9"/>
+                </a:solidFill>
+                <a:latin typeface="Aptos"/>
+              </a:rPr>
+              <a:t>minutes + questions</a:t>
             </a:r>
           </a:p>
         </p:txBody>
@@ -15910,8 +15946,8 @@
         </p:nvSpPr>
         <p:spPr>
           <a:xfrm>
-            <a:off x="7955279" y="5513831"/>
-            <a:ext cx="3200400" cy="27432"/>
+            <a:off x="7955278" y="5321807"/>
+            <a:ext cx="3474721" cy="369332"/>
           </a:xfrm>
           <a:prstGeom prst="rect">
             <a:avLst/>
@@ -15926,7 +15962,7 @@
           <a:p>
             <a:pPr algn="l"/>
             <a:r>
-              <a:rPr sz="1200" b="0">
+              <a:rPr sz="1200" b="0" dirty="0">
                 <a:solidFill>
                   <a:srgbClr val="263341"/>
                 </a:solidFill>
@@ -16164,7 +16200,7 @@
         <p:spPr>
           <a:xfrm>
             <a:off x="658368" y="1417320"/>
-            <a:ext cx="10607040" cy="365760"/>
+            <a:ext cx="10607040" cy="215444"/>
           </a:xfrm>
           <a:prstGeom prst="rect">
             <a:avLst/>
@@ -16179,13 +16215,13 @@
           <a:p>
             <a:pPr algn="l"/>
             <a:r>
-              <a:rPr sz="1400" b="0">
+              <a:rPr sz="1400" b="0" dirty="0">
                 <a:solidFill>
                   <a:srgbClr val="FFFFFF"/>
                 </a:solidFill>
                 <a:latin typeface="Aptos"/>
               </a:rPr>
-              <a:t>When providers are unavailable, the app says so ? and keeps local metrics usable.</a:t>
+              <a:t>When providers are unavailable, the app says so and keeps local metrics usable.</a:t>
             </a:r>
           </a:p>
         </p:txBody>
